--- a/templates/posts/october/2026-10-07-wed-ig-mentor-nick.pptx
+++ b/templates/posts/october/2026-10-07-wed-ig-mentor-nick.pptx
@@ -503,7 +503,7 @@
           <a:lstStyle/>
           <a:p>
             <a:r>
-              <a:t>4C. </a:t>
+              <a:t>4C. Photo: Nick speaking (brief asked for Nick with compost windrows: swap if you have it).</a:t>
             </a:r>
           </a:p>
         </p:txBody>
@@ -3587,12 +3587,20 @@
         <p:nvPr/>
       </p:nvGrpSpPr>
       <p:grpSpPr/>
-      <p:sp>
-        <p:nvSpPr>
-          <p:cNvPr id="2" name="Rectangle 1"/>
-          <p:cNvSpPr/>
+      <p:pic>
+        <p:nvPicPr>
+          <p:cNvPr id="2" name="Picture 1" descr="3190255229309324938.jpg"/>
+          <p:cNvPicPr>
+            <a:picLocks noChangeAspect="1"/>
+          </p:cNvPicPr>
           <p:nvPr/>
-        </p:nvSpPr>
+        </p:nvPicPr>
+        <p:blipFill>
+          <a:blip r:embed="rId3"/>
+          <a:stretch>
+            <a:fillRect/>
+          </a:stretch>
+        </p:blipFill>
         <p:spPr>
           <a:xfrm>
             <a:off x="0" y="0"/>
@@ -3601,78 +3609,11 @@
           <a:prstGeom prst="rect">
             <a:avLst/>
           </a:prstGeom>
-          <a:solidFill>
-            <a:srgbClr val="C9C4B8"/>
-          </a:solidFill>
-          <a:ln>
-            <a:noFill/>
-          </a:ln>
-          <a:effectLst/>
         </p:spPr>
-        <p:style>
-          <a:lnRef idx="1">
-            <a:schemeClr val="accent1"/>
-          </a:lnRef>
-          <a:fillRef idx="3">
-            <a:schemeClr val="accent1"/>
-          </a:fillRef>
-          <a:effectRef idx="2">
-            <a:schemeClr val="accent1"/>
-          </a:effectRef>
-          <a:fontRef idx="minor">
-            <a:schemeClr val="lt1"/>
-          </a:fontRef>
-        </p:style>
-        <p:txBody>
-          <a:bodyPr rtlCol="0" anchor="ctr"/>
-          <a:lstStyle/>
-          <a:p>
-            <a:pPr algn="ctr"/>
-          </a:p>
-        </p:txBody>
-      </p:sp>
-      <p:sp>
-        <p:nvSpPr>
-          <p:cNvPr id="3" name="TextBox 2"/>
-          <p:cNvSpPr txBox="1"/>
-          <p:nvPr/>
-        </p:nvSpPr>
-        <p:spPr>
-          <a:xfrm>
-            <a:off x="152400" y="0"/>
-            <a:ext cx="9982200" cy="12858750"/>
-          </a:xfrm>
-          <a:prstGeom prst="rect">
-            <a:avLst/>
-          </a:prstGeom>
-          <a:noFill/>
-        </p:spPr>
-        <p:txBody>
-          <a:bodyPr wrap="square" lIns="0" rIns="0" tIns="0" bIns="0" anchor="ctr">
-            <a:spAutoFit/>
-          </a:bodyPr>
-          <a:lstStyle/>
-          <a:p>
-            <a:pPr algn="ctr">
-              <a:lnSpc>
-                <a:spcPct val="120000"/>
-              </a:lnSpc>
-            </a:pPr>
-            <a:r>
-              <a:rPr sz="2000" b="1" i="0">
-                <a:solidFill>
-                  <a:srgbClr val="4A463F"/>
-                </a:solidFill>
-                <a:latin typeface="Source Sans 3"/>
-              </a:rPr>
-              <a:t>PHOTO: Nick with compost windrows</a:t>
-            </a:r>
-          </a:p>
-        </p:txBody>
-      </p:sp>
-      <p:sp>
-        <p:nvSpPr>
-          <p:cNvPr id="4" name="Rounded Rectangle 3"/>
+      </p:pic>
+      <p:sp>
+        <p:nvSpPr>
+          <p:cNvPr id="3" name="Rounded Rectangle 2"/>
           <p:cNvSpPr/>
           <p:nvPr/>
         </p:nvSpPr>
@@ -3720,7 +3661,7 @@
       </p:sp>
       <p:sp>
         <p:nvSpPr>
-          <p:cNvPr id="5" name="TextBox 4"/>
+          <p:cNvPr id="4" name="TextBox 3"/>
           <p:cNvSpPr txBox="1"/>
           <p:nvPr/>
         </p:nvSpPr>
@@ -3759,7 +3700,7 @@
       </p:sp>
       <p:sp>
         <p:nvSpPr>
-          <p:cNvPr id="6" name="Rectangle 5"/>
+          <p:cNvPr id="5" name="Rectangle 4"/>
           <p:cNvSpPr/>
           <p:nvPr/>
         </p:nvSpPr>
@@ -3805,7 +3746,7 @@
       </p:sp>
       <p:sp>
         <p:nvSpPr>
-          <p:cNvPr id="7" name="TextBox 6"/>
+          <p:cNvPr id="6" name="TextBox 5"/>
           <p:cNvSpPr txBox="1"/>
           <p:nvPr/>
         </p:nvSpPr>
@@ -3844,7 +3785,7 @@
       </p:sp>
       <p:sp>
         <p:nvSpPr>
-          <p:cNvPr id="8" name="TextBox 7"/>
+          <p:cNvPr id="7" name="TextBox 6"/>
           <p:cNvSpPr txBox="1"/>
           <p:nvPr/>
         </p:nvSpPr>
@@ -3883,7 +3824,7 @@
       </p:sp>
       <p:sp>
         <p:nvSpPr>
-          <p:cNvPr id="9" name="Oval 8"/>
+          <p:cNvPr id="8" name="Oval 7"/>
           <p:cNvSpPr/>
           <p:nvPr/>
         </p:nvSpPr>
@@ -3927,7 +3868,7 @@
       </p:sp>
       <p:sp>
         <p:nvSpPr>
-          <p:cNvPr id="10" name="TextBox 9"/>
+          <p:cNvPr id="9" name="TextBox 8"/>
           <p:cNvSpPr txBox="1"/>
           <p:nvPr/>
         </p:nvSpPr>
@@ -3966,7 +3907,7 @@
       </p:sp>
       <p:sp>
         <p:nvSpPr>
-          <p:cNvPr id="11" name="TextBox 10"/>
+          <p:cNvPr id="10" name="TextBox 9"/>
           <p:cNvSpPr txBox="1"/>
           <p:nvPr/>
         </p:nvSpPr>

--- a/templates/posts/october/2026-10-07-wed-ig-mentor-nick.pptx
+++ b/templates/posts/october/2026-10-07-wed-ig-mentor-nick.pptx
@@ -3589,7 +3589,7 @@
       <p:grpSpPr/>
       <p:pic>
         <p:nvPicPr>
-          <p:cNvPr id="2" name="Picture 1" descr="3190255229309324938.jpg"/>
+          <p:cNvPr id="2" name="Picture 1" descr="5066919161801314509.jpg"/>
           <p:cNvPicPr>
             <a:picLocks noChangeAspect="1"/>
           </p:cNvPicPr>

--- a/templates/posts/october/2026-10-07-wed-ig-mentor-nick.pptx
+++ b/templates/posts/october/2026-10-07-wed-ig-mentor-nick.pptx
@@ -3589,7 +3589,7 @@
       <p:grpSpPr/>
       <p:pic>
         <p:nvPicPr>
-          <p:cNvPr id="2" name="Picture 1" descr="5066919161801314509.jpg"/>
+          <p:cNvPr id="2" name="Picture 1" descr="888689738370392698.jpg"/>
           <p:cNvPicPr>
             <a:picLocks noChangeAspect="1"/>
           </p:cNvPicPr>
@@ -3822,92 +3822,33 @@
           </a:p>
         </p:txBody>
       </p:sp>
-      <p:sp>
-        <p:nvSpPr>
-          <p:cNvPr id="8" name="Oval 7"/>
-          <p:cNvSpPr/>
+      <p:pic>
+        <p:nvPicPr>
+          <p:cNvPr id="8" name="Picture 7" descr="foundation-logo-white.png"/>
+          <p:cNvPicPr>
+            <a:picLocks noChangeAspect="1"/>
+          </p:cNvPicPr>
           <p:nvPr/>
-        </p:nvSpPr>
+        </p:nvPicPr>
+        <p:blipFill>
+          <a:blip r:embed="rId4"/>
+          <a:stretch>
+            <a:fillRect/>
+          </a:stretch>
+        </p:blipFill>
         <p:spPr>
           <a:xfrm>
-            <a:off x="8667750" y="11239500"/>
-            <a:ext cx="857250" cy="857250"/>
-          </a:xfrm>
-          <a:prstGeom prst="ellipse">
-            <a:avLst/>
-          </a:prstGeom>
-          <a:noFill/>
-          <a:ln w="19050">
-            <a:solidFill>
-              <a:srgbClr val="F4F1EA"/>
-            </a:solidFill>
-          </a:ln>
-          <a:effectLst/>
-        </p:spPr>
-        <p:style>
-          <a:lnRef idx="1">
-            <a:schemeClr val="accent1"/>
-          </a:lnRef>
-          <a:fillRef idx="3">
-            <a:schemeClr val="accent1"/>
-          </a:fillRef>
-          <a:effectRef idx="2">
-            <a:schemeClr val="accent1"/>
-          </a:effectRef>
-          <a:fontRef idx="minor">
-            <a:schemeClr val="lt1"/>
-          </a:fontRef>
-        </p:style>
-        <p:txBody>
-          <a:bodyPr rtlCol="0" anchor="ctr"/>
-          <a:lstStyle/>
-          <a:p>
-            <a:pPr algn="ctr"/>
-          </a:p>
-        </p:txBody>
-      </p:sp>
-      <p:sp>
-        <p:nvSpPr>
-          <p:cNvPr id="9" name="TextBox 8"/>
-          <p:cNvSpPr txBox="1"/>
-          <p:nvPr/>
-        </p:nvSpPr>
-        <p:spPr>
-          <a:xfrm>
-            <a:off x="8667750" y="11239500"/>
-            <a:ext cx="857250" cy="857250"/>
+            <a:off x="8571501" y="11239500"/>
+            <a:ext cx="953498" cy="857250"/>
           </a:xfrm>
           <a:prstGeom prst="rect">
             <a:avLst/>
           </a:prstGeom>
-          <a:noFill/>
         </p:spPr>
-        <p:txBody>
-          <a:bodyPr wrap="square" lIns="0" rIns="0" tIns="0" bIns="0" anchor="ctr">
-            <a:spAutoFit/>
-          </a:bodyPr>
-          <a:lstStyle/>
-          <a:p>
-            <a:pPr algn="ctr">
-              <a:lnSpc>
-                <a:spcPct val="120000"/>
-              </a:lnSpc>
-            </a:pPr>
-            <a:r>
-              <a:rPr sz="1800" b="1" i="0">
-                <a:solidFill>
-                  <a:srgbClr val="F4F1EA"/>
-                </a:solidFill>
-                <a:latin typeface="Montserrat"/>
-              </a:rPr>
-              <a:t>LOGO</a:t>
-            </a:r>
-          </a:p>
-        </p:txBody>
-      </p:sp>
-      <p:sp>
-        <p:nvSpPr>
-          <p:cNvPr id="10" name="TextBox 9"/>
+      </p:pic>
+      <p:sp>
+        <p:nvSpPr>
+          <p:cNvPr id="9" name="TextBox 8"/>
           <p:cNvSpPr txBox="1"/>
           <p:nvPr/>
         </p:nvSpPr>

--- a/templates/posts/october/2026-10-07-wed-ig-mentor-nick.pptx
+++ b/templates/posts/october/2026-10-07-wed-ig-mentor-nick.pptx
@@ -3575,7 +3575,7 @@
     <p:bg>
       <p:bgPr>
         <a:solidFill>
-          <a:srgbClr val="22371F"/>
+          <a:srgbClr val="1E3F1D"/>
         </a:solidFill>
         <a:effectLst/>
       </p:bgPr>
@@ -3589,7 +3589,7 @@
       <p:grpSpPr/>
       <p:pic>
         <p:nvPicPr>
-          <p:cNvPr id="2" name="Picture 1" descr="888689738370392698.jpg"/>
+          <p:cNvPr id="2" name="Picture 1" descr="4361697907151236161.jpg"/>
           <p:cNvPicPr>
             <a:picLocks noChangeAspect="1"/>
           </p:cNvPicPr>
@@ -3628,7 +3628,7 @@
             </a:avLst>
           </a:prstGeom>
           <a:solidFill>
-            <a:srgbClr val="22371F">
+            <a:srgbClr val="1E3F1D">
               <a:alpha val="90000"/>
             </a:srgbClr>
           </a:solidFill>
@@ -3689,7 +3689,7 @@
             <a:r>
               <a:rPr sz="2200" b="1" i="0" spc="200">
                 <a:solidFill>
-                  <a:srgbClr val="DBE6A7"/>
+                  <a:srgbClr val="B1BCB1"/>
                 </a:solidFill>
                 <a:latin typeface="Montserrat"/>
               </a:rPr>
@@ -3713,7 +3713,7 @@
             <a:avLst/>
           </a:prstGeom>
           <a:solidFill>
-            <a:srgbClr val="22371F">
+            <a:srgbClr val="1E3F1D">
               <a:alpha val="90000"/>
             </a:srgbClr>
           </a:solidFill>
@@ -3774,7 +3774,7 @@
             <a:r>
               <a:rPr sz="5800" b="1" i="0">
                 <a:solidFill>
-                  <a:srgbClr val="F4F1EA"/>
+                  <a:srgbClr val="F3F1EA"/>
                 </a:solidFill>
                 <a:latin typeface="Montserrat"/>
               </a:rPr>
@@ -3813,7 +3813,7 @@
             <a:r>
               <a:rPr sz="3000" b="0" i="0">
                 <a:solidFill>
-                  <a:srgbClr val="DBE6A7"/>
+                  <a:srgbClr val="B1BCB1"/>
                 </a:solidFill>
                 <a:latin typeface="Source Sans 3"/>
               </a:rPr>
@@ -3876,7 +3876,7 @@
             <a:r>
               <a:rPr sz="2000" b="0" i="0">
                 <a:solidFill>
-                  <a:srgbClr val="F4F1EA">
+                  <a:srgbClr val="F3F1EA">
                     <a:alpha val="60000"/>
                   </a:srgbClr>
                 </a:solidFill>
@@ -3901,7 +3901,7 @@
     <p:bg>
       <p:bgPr>
         <a:solidFill>
-          <a:srgbClr val="F4F1EA"/>
+          <a:srgbClr val="F3F1EA"/>
         </a:solidFill>
         <a:effectLst/>
       </p:bgPr>
@@ -3943,7 +3943,7 @@
             <a:r>
               <a:rPr sz="20000" b="1" i="0">
                 <a:solidFill>
-                  <a:srgbClr val="156826"/>
+                  <a:srgbClr val="31662F"/>
                 </a:solidFill>
                 <a:latin typeface="Montserrat"/>
               </a:rPr>
@@ -3982,7 +3982,7 @@
             <a:r>
               <a:rPr sz="5600" b="1" i="0">
                 <a:solidFill>
-                  <a:srgbClr val="22371F"/>
+                  <a:srgbClr val="1E3F1D"/>
                 </a:solidFill>
                 <a:latin typeface="Montserrat"/>
               </a:rPr>

--- a/templates/posts/october/2026-10-07-wed-ig-mentor-nick.pptx
+++ b/templates/posts/october/2026-10-07-wed-ig-mentor-nick.pptx
@@ -3589,7 +3589,7 @@
       <p:grpSpPr/>
       <p:pic>
         <p:nvPicPr>
-          <p:cNvPr id="2" name="Picture 1" descr="4361697907151236161.jpg"/>
+          <p:cNvPr id="2" name="Picture 1" descr="5914876445251880096.jpg"/>
           <p:cNvPicPr>
             <a:picLocks noChangeAspect="1"/>
           </p:cNvPicPr>
@@ -3817,7 +3817,7 @@
                 </a:solidFill>
                 <a:latin typeface="Source Sans 3"/>
               </a:rPr>
-              <a:t>Norfolk, England</a:t>
+              <a:t>West Norfolk, England</a:t>
             </a:r>
           </a:p>
         </p:txBody>
